--- a/quarto/_extensions/wicrt/wicrt-template.pptx
+++ b/quarto/_extensions/wicrt/wicrt-template.pptx
@@ -878,6 +878,22 @@
               <a:rPr lang="en-US"/>
               <a:t>CRT Annual Training Conference 2026</a:t>
             </a:r>
+            <a:r>
+              <a:rPr lang="en-US"/>
+              <a:t>  ·  </a:t>
+            </a:r>
+            <a:r>
+              <a:rPr lang="en-US">
+                <a:hlinkClick r:id="rIdGitHubFooter">
+                  <a:extLst>
+                    <a:ext uri="{A12FA001-AC4F-418D-AE19-62706E023703}">
+                      <ahyp:hlinkClr xmlns:ahyp="http://schemas.microsoft.com/office/drawing/2018/hyperlinkcolor" val="tx"/>
+                    </a:ext>
+                  </a:extLst>
+                </a:hlinkClick>
+              </a:rPr>
+              <a:t>github.com/dzampino/crt-essentials-2026</a:t>
+            </a:r>
           </a:p>
         </p:txBody>
       </p:sp>
@@ -1055,6 +1071,22 @@
               <a:rPr lang="en-US"/>
               <a:t>CRT Annual Training Conference 2026</a:t>
             </a:r>
+            <a:r>
+              <a:rPr lang="en-US"/>
+              <a:t>  ·  </a:t>
+            </a:r>
+            <a:r>
+              <a:rPr lang="en-US">
+                <a:hlinkClick r:id="rIdGitHubFooter">
+                  <a:extLst>
+                    <a:ext uri="{A12FA001-AC4F-418D-AE19-62706E023703}">
+                      <ahyp:hlinkClr xmlns:ahyp="http://schemas.microsoft.com/office/drawing/2018/hyperlinkcolor" val="tx"/>
+                    </a:ext>
+                  </a:extLst>
+                </a:hlinkClick>
+              </a:rPr>
+              <a:t>github.com/dzampino/crt-essentials-2026</a:t>
+            </a:r>
           </a:p>
         </p:txBody>
       </p:sp>
@@ -1238,6 +1270,22 @@
             <a:r>
               <a:rPr lang="en-US"/>
               <a:t>CRT Annual Training Conference 2026</a:t>
+            </a:r>
+            <a:r>
+              <a:rPr lang="en-US"/>
+              <a:t>  ·  </a:t>
+            </a:r>
+            <a:r>
+              <a:rPr lang="en-US">
+                <a:hlinkClick r:id="rIdGitHubFooter">
+                  <a:extLst>
+                    <a:ext uri="{A12FA001-AC4F-418D-AE19-62706E023703}">
+                      <ahyp:hlinkClr xmlns:ahyp="http://schemas.microsoft.com/office/drawing/2018/hyperlinkcolor" val="tx"/>
+                    </a:ext>
+                  </a:extLst>
+                </a:hlinkClick>
+              </a:rPr>
+              <a:t>github.com/dzampino/crt-essentials-2026</a:t>
             </a:r>
           </a:p>
         </p:txBody>
@@ -1498,6 +1546,22 @@
               <a:rPr lang="en-US"/>
               <a:t>CRT Annual Training Conference 2026</a:t>
             </a:r>
+            <a:r>
+              <a:rPr lang="en-US"/>
+              <a:t>  ·  </a:t>
+            </a:r>
+            <a:r>
+              <a:rPr lang="en-US">
+                <a:hlinkClick r:id="rIdGitHubFooter">
+                  <a:extLst>
+                    <a:ext uri="{A12FA001-AC4F-418D-AE19-62706E023703}">
+                      <ahyp:hlinkClr xmlns:ahyp="http://schemas.microsoft.com/office/drawing/2018/hyperlinkcolor" val="tx"/>
+                    </a:ext>
+                  </a:extLst>
+                </a:hlinkClick>
+              </a:rPr>
+              <a:t>github.com/dzampino/crt-essentials-2026</a:t>
+            </a:r>
           </a:p>
         </p:txBody>
       </p:sp>
@@ -1722,6 +1786,22 @@
               <a:rPr lang="en-US"/>
               <a:t>CRT Annual Training Conference 2026</a:t>
             </a:r>
+            <a:r>
+              <a:rPr lang="en-US"/>
+              <a:t>  ·  </a:t>
+            </a:r>
+            <a:r>
+              <a:rPr lang="en-US">
+                <a:hlinkClick r:id="rIdGitHubFooter">
+                  <a:extLst>
+                    <a:ext uri="{A12FA001-AC4F-418D-AE19-62706E023703}">
+                      <ahyp:hlinkClr xmlns:ahyp="http://schemas.microsoft.com/office/drawing/2018/hyperlinkcolor" val="tx"/>
+                    </a:ext>
+                  </a:extLst>
+                </a:hlinkClick>
+              </a:rPr>
+              <a:t>github.com/dzampino/crt-essentials-2026</a:t>
+            </a:r>
           </a:p>
         </p:txBody>
       </p:sp>
@@ -2038,6 +2118,22 @@
               <a:rPr lang="en-US"/>
               <a:t>CRT Annual Training Conference 2026</a:t>
             </a:r>
+            <a:r>
+              <a:rPr lang="en-US"/>
+              <a:t>  ·  </a:t>
+            </a:r>
+            <a:r>
+              <a:rPr lang="en-US">
+                <a:hlinkClick r:id="rIdGitHubFooter">
+                  <a:extLst>
+                    <a:ext uri="{A12FA001-AC4F-418D-AE19-62706E023703}">
+                      <ahyp:hlinkClr xmlns:ahyp="http://schemas.microsoft.com/office/drawing/2018/hyperlinkcolor" val="tx"/>
+                    </a:ext>
+                  </a:extLst>
+                </a:hlinkClick>
+              </a:rPr>
+              <a:t>github.com/dzampino/crt-essentials-2026</a:t>
+            </a:r>
           </a:p>
         </p:txBody>
       </p:sp>
@@ -2182,6 +2278,22 @@
               <a:rPr lang="en-US"/>
               <a:t>CRT Annual Training Conference 2026</a:t>
             </a:r>
+            <a:r>
+              <a:rPr lang="en-US"/>
+              <a:t>  ·  </a:t>
+            </a:r>
+            <a:r>
+              <a:rPr lang="en-US">
+                <a:hlinkClick r:id="rIdGitHubFooter">
+                  <a:extLst>
+                    <a:ext uri="{A12FA001-AC4F-418D-AE19-62706E023703}">
+                      <ahyp:hlinkClr xmlns:ahyp="http://schemas.microsoft.com/office/drawing/2018/hyperlinkcolor" val="tx"/>
+                    </a:ext>
+                  </a:extLst>
+                </a:hlinkClick>
+              </a:rPr>
+              <a:t>github.com/dzampino/crt-essentials-2026</a:t>
+            </a:r>
           </a:p>
         </p:txBody>
       </p:sp>
@@ -2293,6 +2405,22 @@
               <a:rPr lang="en-US"/>
               <a:t>CRT Annual Training Conference 2026</a:t>
             </a:r>
+            <a:r>
+              <a:rPr lang="en-US"/>
+              <a:t>  ·  </a:t>
+            </a:r>
+            <a:r>
+              <a:rPr lang="en-US">
+                <a:hlinkClick r:id="rIdGitHubFooter">
+                  <a:extLst>
+                    <a:ext uri="{A12FA001-AC4F-418D-AE19-62706E023703}">
+                      <ahyp:hlinkClr xmlns:ahyp="http://schemas.microsoft.com/office/drawing/2018/hyperlinkcolor" val="tx"/>
+                    </a:ext>
+                  </a:extLst>
+                </a:hlinkClick>
+              </a:rPr>
+              <a:t>github.com/dzampino/crt-essentials-2026</a:t>
+            </a:r>
           </a:p>
         </p:txBody>
       </p:sp>
@@ -2525,6 +2653,22 @@
               <a:rPr lang="en-US"/>
               <a:t>CRT Annual Training Conference 2026</a:t>
             </a:r>
+            <a:r>
+              <a:rPr lang="en-US"/>
+              <a:t>  ·  </a:t>
+            </a:r>
+            <a:r>
+              <a:rPr lang="en-US">
+                <a:hlinkClick r:id="rIdGitHubFooter">
+                  <a:extLst>
+                    <a:ext uri="{A12FA001-AC4F-418D-AE19-62706E023703}">
+                      <ahyp:hlinkClr xmlns:ahyp="http://schemas.microsoft.com/office/drawing/2018/hyperlinkcolor" val="tx"/>
+                    </a:ext>
+                  </a:extLst>
+                </a:hlinkClick>
+              </a:rPr>
+              <a:t>github.com/dzampino/crt-essentials-2026</a:t>
+            </a:r>
           </a:p>
         </p:txBody>
       </p:sp>
@@ -2754,6 +2898,22 @@
             <a:r>
               <a:rPr lang="en-US"/>
               <a:t>CRT Annual Training Conference 2026</a:t>
+            </a:r>
+            <a:r>
+              <a:rPr lang="en-US"/>
+              <a:t>  ·  </a:t>
+            </a:r>
+            <a:r>
+              <a:rPr lang="en-US">
+                <a:hlinkClick r:id="rIdGitHubFooter">
+                  <a:extLst>
+                    <a:ext uri="{A12FA001-AC4F-418D-AE19-62706E023703}">
+                      <ahyp:hlinkClr xmlns:ahyp="http://schemas.microsoft.com/office/drawing/2018/hyperlinkcolor" val="tx"/>
+                    </a:ext>
+                  </a:extLst>
+                </a:hlinkClick>
+              </a:rPr>
+              <a:t>github.com/dzampino/crt-essentials-2026</a:t>
             </a:r>
           </a:p>
         </p:txBody>
@@ -3010,6 +3170,22 @@
             <a:r>
               <a:rPr lang="en-US"/>
               <a:t>CRT Annual Training Conference 2026</a:t>
+            </a:r>
+            <a:r>
+              <a:rPr lang="en-US"/>
+              <a:t>  ·  </a:t>
+            </a:r>
+            <a:r>
+              <a:rPr lang="en-US">
+                <a:hlinkClick r:id="rIdGitHubFooter">
+                  <a:extLst>
+                    <a:ext uri="{A12FA001-AC4F-418D-AE19-62706E023703}">
+                      <ahyp:hlinkClr xmlns:ahyp="http://schemas.microsoft.com/office/drawing/2018/hyperlinkcolor" val="tx"/>
+                    </a:ext>
+                  </a:extLst>
+                </a:hlinkClick>
+              </a:rPr>
+              <a:t>github.com/dzampino/crt-essentials-2026</a:t>
             </a:r>
           </a:p>
         </p:txBody>
@@ -3553,6 +3729,22 @@
               <a:rPr lang="en-US"/>
               <a:t>CRT Annual Training Conference 2026</a:t>
             </a:r>
+            <a:r>
+              <a:rPr lang="en-US"/>
+              <a:t>  ·  </a:t>
+            </a:r>
+            <a:r>
+              <a:rPr lang="en-US">
+                <a:hlinkClick r:id="rIdGitHubFooter">
+                  <a:extLst>
+                    <a:ext uri="{A12FA001-AC4F-418D-AE19-62706E023703}">
+                      <ahyp:hlinkClr xmlns:ahyp="http://schemas.microsoft.com/office/drawing/2018/hyperlinkcolor" val="tx"/>
+                    </a:ext>
+                  </a:extLst>
+                </a:hlinkClick>
+              </a:rPr>
+              <a:t>github.com/dzampino/crt-essentials-2026</a:t>
+            </a:r>
           </a:p>
         </p:txBody>
       </p:sp>
@@ -3768,6 +3960,22 @@
               <a:rPr lang="en-US"/>
               <a:t>CRT Annual Training Conference 2026</a:t>
             </a:r>
+            <a:r>
+              <a:rPr lang="en-US"/>
+              <a:t>  ·  </a:t>
+            </a:r>
+            <a:r>
+              <a:rPr lang="en-US">
+                <a:hlinkClick r:id="rIdGitHubFooter">
+                  <a:extLst>
+                    <a:ext uri="{A12FA001-AC4F-418D-AE19-62706E023703}">
+                      <ahyp:hlinkClr xmlns:ahyp="http://schemas.microsoft.com/office/drawing/2018/hyperlinkcolor" val="tx"/>
+                    </a:ext>
+                  </a:extLst>
+                </a:hlinkClick>
+              </a:rPr>
+              <a:t>github.com/dzampino/crt-essentials-2026</a:t>
+            </a:r>
           </a:p>
         </p:txBody>
       </p:sp>
@@ -3938,6 +4146,22 @@
               <a:rPr lang="en-US"/>
               <a:t>CRT Annual Training Conference 2026</a:t>
             </a:r>
+            <a:r>
+              <a:rPr lang="en-US"/>
+              <a:t>  ·  </a:t>
+            </a:r>
+            <a:r>
+              <a:rPr lang="en-US">
+                <a:hlinkClick r:id="rIdGitHubFooter">
+                  <a:extLst>
+                    <a:ext uri="{A12FA001-AC4F-418D-AE19-62706E023703}">
+                      <ahyp:hlinkClr xmlns:ahyp="http://schemas.microsoft.com/office/drawing/2018/hyperlinkcolor" val="tx"/>
+                    </a:ext>
+                  </a:extLst>
+                </a:hlinkClick>
+              </a:rPr>
+              <a:t>github.com/dzampino/crt-essentials-2026</a:t>
+            </a:r>
           </a:p>
         </p:txBody>
       </p:sp>
@@ -4147,6 +4371,22 @@
             <a:r>
               <a:rPr lang="en-US"/>
               <a:t>CRT Annual Training Conference 2026</a:t>
+            </a:r>
+            <a:r>
+              <a:rPr lang="en-US"/>
+              <a:t>  ·  </a:t>
+            </a:r>
+            <a:r>
+              <a:rPr lang="en-US">
+                <a:hlinkClick r:id="rIdGitHubFooter">
+                  <a:extLst>
+                    <a:ext uri="{A12FA001-AC4F-418D-AE19-62706E023703}">
+                      <ahyp:hlinkClr xmlns:ahyp="http://schemas.microsoft.com/office/drawing/2018/hyperlinkcolor" val="tx"/>
+                    </a:ext>
+                  </a:extLst>
+                </a:hlinkClick>
+              </a:rPr>
+              <a:t>github.com/dzampino/crt-essentials-2026</a:t>
             </a:r>
           </a:p>
         </p:txBody>
@@ -4526,6 +4766,22 @@
               <a:rPr lang="en-US"/>
               <a:t>CRT Annual Training Conference 2026</a:t>
             </a:r>
+            <a:r>
+              <a:rPr lang="en-US"/>
+              <a:t>  ·  </a:t>
+            </a:r>
+            <a:r>
+              <a:rPr lang="en-US">
+                <a:hlinkClick r:id="rIdGitHubFooter">
+                  <a:extLst>
+                    <a:ext uri="{A12FA001-AC4F-418D-AE19-62706E023703}">
+                      <ahyp:hlinkClr xmlns:ahyp="http://schemas.microsoft.com/office/drawing/2018/hyperlinkcolor" val="tx"/>
+                    </a:ext>
+                  </a:extLst>
+                </a:hlinkClick>
+              </a:rPr>
+              <a:t>github.com/dzampino/crt-essentials-2026</a:t>
+            </a:r>
           </a:p>
         </p:txBody>
       </p:sp>
@@ -4784,6 +5040,22 @@
             <a:r>
               <a:rPr lang="en-US"/>
               <a:t>CRT Annual Training Conference 2026</a:t>
+            </a:r>
+            <a:r>
+              <a:rPr lang="en-US"/>
+              <a:t>  ·  </a:t>
+            </a:r>
+            <a:r>
+              <a:rPr lang="en-US">
+                <a:hlinkClick r:id="rIdGitHubFooter">
+                  <a:extLst>
+                    <a:ext uri="{A12FA001-AC4F-418D-AE19-62706E023703}">
+                      <ahyp:hlinkClr xmlns:ahyp="http://schemas.microsoft.com/office/drawing/2018/hyperlinkcolor" val="tx"/>
+                    </a:ext>
+                  </a:extLst>
+                </a:hlinkClick>
+              </a:rPr>
+              <a:t>github.com/dzampino/crt-essentials-2026</a:t>
             </a:r>
           </a:p>
         </p:txBody>
